--- a/topic10-interfaces/unit-10a-lectures/talk-2-intro-to-interfaces/b-intro-to-interfaces.pptx
+++ b/topic10-interfaces/unit-10a-lectures/talk-2-intro-to-interfaces/b-intro-to-interfaces.pptx
@@ -229,7 +229,7 @@
           <a:p>
             <a:fld id="{56BC3C30-7F3D-4B20-9974-47C57B22CA6E}" type="datetimeFigureOut">
               <a:rPr lang="en-IE" smtClean="0"/>
-              <a:t>19/03/2024</a:t>
+              <a:t>09/04/2026</a:t>
             </a:fld>
             <a:endParaRPr lang="en-IE"/>
           </a:p>
@@ -677,7 +677,7 @@
             <a:fld id="{1D8BD707-D9CF-40AE-B4C6-C98DA3205C09}" type="datetimeFigureOut">
               <a:rPr lang="en-US" smtClean="0"/>
               <a:pPr/>
-              <a:t>3/19/24</a:t>
+              <a:t>4/9/2026</a:t>
             </a:fld>
             <a:endParaRPr lang="en-US"/>
           </a:p>
@@ -842,7 +842,7 @@
             <a:fld id="{1D8BD707-D9CF-40AE-B4C6-C98DA3205C09}" type="datetimeFigureOut">
               <a:rPr lang="en-US" smtClean="0"/>
               <a:pPr/>
-              <a:t>3/19/24</a:t>
+              <a:t>4/9/2026</a:t>
             </a:fld>
             <a:endParaRPr lang="en-US"/>
           </a:p>
@@ -1017,7 +1017,7 @@
             <a:fld id="{1D8BD707-D9CF-40AE-B4C6-C98DA3205C09}" type="datetimeFigureOut">
               <a:rPr lang="en-US" smtClean="0"/>
               <a:pPr/>
-              <a:t>3/19/24</a:t>
+              <a:t>4/9/2026</a:t>
             </a:fld>
             <a:endParaRPr lang="en-US"/>
           </a:p>
@@ -1193,7 +1193,7 @@
           </a:ln>
           <a:extLst>
             <a:ext uri="{C572A759-6A51-4108-AA02-DFA0A04FC94B}">
-              <ma14:wrappingTextBoxFlag xmlns="" xmlns:ma14="http://schemas.microsoft.com/office/mac/drawingml/2011/main" val="1"/>
+              <ma14:wrappingTextBoxFlag xmlns:ma14="http://schemas.microsoft.com/office/mac/drawingml/2011/main" xmlns="" val="1"/>
             </a:ext>
           </a:extLst>
         </p:spPr>
@@ -1280,7 +1280,7 @@
             <a:effectLst/>
             <a:extLst>
               <a:ext uri="{C572A759-6A51-4108-AA02-DFA0A04FC94B}">
-                <ma14:wrappingTextBoxFlag xmlns="" xmlns:ma14="http://schemas.microsoft.com/office/mac/drawingml/2011/main" val="1"/>
+                <ma14:wrappingTextBoxFlag xmlns:ma14="http://schemas.microsoft.com/office/mac/drawingml/2011/main" xmlns="" val="1"/>
               </a:ext>
             </a:extLst>
           </p:spPr>
@@ -1353,7 +1353,7 @@
             <a:effectLst/>
             <a:extLst>
               <a:ext uri="{C572A759-6A51-4108-AA02-DFA0A04FC94B}">
-                <ma14:wrappingTextBoxFlag xmlns="" xmlns:ma14="http://schemas.microsoft.com/office/mac/drawingml/2011/main" val="1"/>
+                <ma14:wrappingTextBoxFlag xmlns:ma14="http://schemas.microsoft.com/office/mac/drawingml/2011/main" xmlns="" val="1"/>
               </a:ext>
             </a:extLst>
           </p:spPr>
@@ -1404,7 +1404,7 @@
             <a:effectLst/>
             <a:extLst>
               <a:ext uri="{C572A759-6A51-4108-AA02-DFA0A04FC94B}">
-                <ma14:wrappingTextBoxFlag xmlns="" xmlns:ma14="http://schemas.microsoft.com/office/mac/drawingml/2011/main" val="1"/>
+                <ma14:wrappingTextBoxFlag xmlns:ma14="http://schemas.microsoft.com/office/mac/drawingml/2011/main" xmlns="" val="1"/>
               </a:ext>
             </a:extLst>
           </p:spPr>
@@ -1797,7 +1797,7 @@
             <a:fld id="{1D8BD707-D9CF-40AE-B4C6-C98DA3205C09}" type="datetimeFigureOut">
               <a:rPr lang="en-US" smtClean="0"/>
               <a:pPr/>
-              <a:t>3/19/24</a:t>
+              <a:t>4/9/2026</a:t>
             </a:fld>
             <a:endParaRPr lang="en-US"/>
           </a:p>
@@ -2077,7 +2077,7 @@
             <a:fld id="{1D8BD707-D9CF-40AE-B4C6-C98DA3205C09}" type="datetimeFigureOut">
               <a:rPr lang="en-US" smtClean="0"/>
               <a:pPr/>
-              <a:t>3/19/24</a:t>
+              <a:t>4/9/2026</a:t>
             </a:fld>
             <a:endParaRPr lang="en-US"/>
           </a:p>
@@ -2370,7 +2370,7 @@
             <a:fld id="{1D8BD707-D9CF-40AE-B4C6-C98DA3205C09}" type="datetimeFigureOut">
               <a:rPr lang="en-US" smtClean="0"/>
               <a:pPr/>
-              <a:t>3/19/24</a:t>
+              <a:t>4/9/2026</a:t>
             </a:fld>
             <a:endParaRPr lang="en-US"/>
           </a:p>
@@ -2828,7 +2828,7 @@
             <a:fld id="{1D8BD707-D9CF-40AE-B4C6-C98DA3205C09}" type="datetimeFigureOut">
               <a:rPr lang="en-US" smtClean="0"/>
               <a:pPr/>
-              <a:t>3/19/24</a:t>
+              <a:t>4/9/2026</a:t>
             </a:fld>
             <a:endParaRPr lang="en-US"/>
           </a:p>
@@ -2988,7 +2988,7 @@
             <a:fld id="{1D8BD707-D9CF-40AE-B4C6-C98DA3205C09}" type="datetimeFigureOut">
               <a:rPr lang="en-US" smtClean="0"/>
               <a:pPr/>
-              <a:t>3/19/24</a:t>
+              <a:t>4/9/2026</a:t>
             </a:fld>
             <a:endParaRPr lang="en-US"/>
           </a:p>
@@ -3115,7 +3115,7 @@
             <a:fld id="{1D8BD707-D9CF-40AE-B4C6-C98DA3205C09}" type="datetimeFigureOut">
               <a:rPr lang="en-US" smtClean="0"/>
               <a:pPr/>
-              <a:t>3/19/24</a:t>
+              <a:t>4/9/2026</a:t>
             </a:fld>
             <a:endParaRPr lang="en-US"/>
           </a:p>
@@ -3387,7 +3387,7 @@
             <a:fld id="{1D8BD707-D9CF-40AE-B4C6-C98DA3205C09}" type="datetimeFigureOut">
               <a:rPr lang="en-US" smtClean="0"/>
               <a:pPr/>
-              <a:t>3/19/24</a:t>
+              <a:t>4/9/2026</a:t>
             </a:fld>
             <a:endParaRPr lang="en-US"/>
           </a:p>
@@ -3636,7 +3636,7 @@
             <a:fld id="{1D8BD707-D9CF-40AE-B4C6-C98DA3205C09}" type="datetimeFigureOut">
               <a:rPr lang="en-US" smtClean="0"/>
               <a:pPr/>
-              <a:t>3/19/24</a:t>
+              <a:t>4/9/2026</a:t>
             </a:fld>
             <a:endParaRPr lang="en-US"/>
           </a:p>
@@ -3844,7 +3844,7 @@
             <a:fld id="{1D8BD707-D9CF-40AE-B4C6-C98DA3205C09}" type="datetimeFigureOut">
               <a:rPr lang="en-US" smtClean="0"/>
               <a:pPr/>
-              <a:t>3/19/24</a:t>
+              <a:t>4/9/2026</a:t>
             </a:fld>
             <a:endParaRPr lang="en-US"/>
           </a:p>
@@ -4554,7 +4554,7 @@
           <p:nvPr/>
         </p:nvPicPr>
         <p:blipFill>
-          <a:blip r:embed="rId3">
+          <a:blip r:embed="rId3" cstate="print">
             <a:extLst>
               <a:ext uri="{28A0092B-C50C-407E-A947-70E740481C1C}">
                 <a14:useLocalDpi xmlns:a14="http://schemas.microsoft.com/office/drawing/2010/main" val="0"/>
@@ -6690,62 +6690,23 @@
           <a:chExt cx="0" cy="0"/>
         </a:xfrm>
       </p:grpSpPr>
-      <p:pic>
-        <p:nvPicPr>
-          <p:cNvPr id="8194" name="Picture 2" descr="C:\Users\Siobhan\AppData\Local\Microsoft\Windows\Temporary Internet Files\Content.IE5\D6SFLNVW\questions-2[1].jpg"/>
-          <p:cNvPicPr>
-            <a:picLocks noChangeAspect="1" noChangeArrowheads="1"/>
-          </p:cNvPicPr>
+      <p:sp>
+        <p:nvSpPr>
+          <p:cNvPr id="2" name="Arrow: Pentagon 1"/>
+          <p:cNvSpPr/>
           <p:nvPr/>
-        </p:nvPicPr>
-        <p:blipFill>
-          <a:blip r:embed="rId3">
-            <a:extLst>
-              <a:ext uri="{28A0092B-C50C-407E-A947-70E740481C1C}">
-                <a14:useLocalDpi xmlns:a14="http://schemas.microsoft.com/office/drawing/2010/main" val="0"/>
-              </a:ext>
-            </a:extLst>
-          </a:blip>
-          <a:srcRect/>
-          <a:stretch>
-            <a:fillRect/>
-          </a:stretch>
-        </p:blipFill>
-        <p:spPr bwMode="auto">
+        </p:nvSpPr>
+        <p:spPr>
           <a:xfrm>
-            <a:off x="5492403" y="1371600"/>
-            <a:ext cx="4394200" cy="4394200"/>
+            <a:off x="1289261" y="2362200"/>
+            <a:ext cx="4120939" cy="1754326"/>
           </a:xfrm>
-          <a:prstGeom prst="rect">
+          <a:prstGeom prst="homePlate">
             <a:avLst/>
           </a:prstGeom>
-          <a:noFill/>
-          <a:extLst>
-            <a:ext uri="{909E8E84-426E-40DD-AFC4-6F175D3DCCD1}">
-              <a14:hiddenFill xmlns:a14="http://schemas.microsoft.com/office/drawing/2010/main">
-                <a:solidFill>
-                  <a:srgbClr val="FFFFFF"/>
-                </a:solidFill>
-              </a14:hiddenFill>
-            </a:ext>
-          </a:extLst>
-        </p:spPr>
-      </p:pic>
-      <p:sp>
-        <p:nvSpPr>
-          <p:cNvPr id="2" name="Rectangle 1"/>
-          <p:cNvSpPr/>
-          <p:nvPr/>
-        </p:nvSpPr>
-        <p:spPr>
-          <a:xfrm>
-            <a:off x="2514601" y="2741474"/>
-            <a:ext cx="3485803" cy="1754326"/>
-          </a:xfrm>
-          <a:prstGeom prst="rect">
-            <a:avLst/>
-          </a:prstGeom>
-          <a:noFill/>
+          <a:solidFill>
+            <a:schemeClr val="tx1"/>
+          </a:solidFill>
         </p:spPr>
         <p:txBody>
           <a:bodyPr wrap="square" lIns="91440" tIns="45720" rIns="91440" bIns="45720">
@@ -6771,31 +6732,11 @@
             <a:r>
               <a:rPr lang="en-US" sz="5400" b="1" dirty="0">
                 <a:ln w="11430"/>
-                <a:gradFill>
-                  <a:gsLst>
-                    <a:gs pos="0">
-                      <a:schemeClr val="accent2">
-                        <a:tint val="70000"/>
-                        <a:satMod val="245000"/>
-                      </a:schemeClr>
-                    </a:gs>
-                    <a:gs pos="75000">
-                      <a:schemeClr val="accent2">
-                        <a:tint val="90000"/>
-                        <a:shade val="60000"/>
-                        <a:satMod val="240000"/>
-                      </a:schemeClr>
-                    </a:gs>
-                    <a:gs pos="100000">
-                      <a:schemeClr val="accent2">
-                        <a:tint val="100000"/>
-                        <a:shade val="50000"/>
-                        <a:satMod val="240000"/>
-                      </a:schemeClr>
-                    </a:gs>
-                  </a:gsLst>
-                  <a:lin ang="5400000"/>
-                </a:gradFill>
+                <a:solidFill>
+                  <a:schemeClr val="bg1">
+                    <a:lumMod val="95000"/>
+                  </a:schemeClr>
+                </a:solidFill>
                 <a:effectLst>
                   <a:outerShdw blurRad="50800" dist="39000" dir="5460000" algn="tl">
                     <a:srgbClr val="000000">
@@ -6809,6 +6750,43 @@
           </a:p>
         </p:txBody>
       </p:sp>
+      <p:pic>
+        <p:nvPicPr>
+          <p:cNvPr id="3" name="Picture 2" descr="A green question mark in a circle&#10;&#10;AI-generated content may be incorrect.">
+            <a:extLst>
+              <a:ext uri="{FF2B5EF4-FFF2-40B4-BE49-F238E27FC236}">
+                <a16:creationId xmlns:a16="http://schemas.microsoft.com/office/drawing/2014/main" id="{5CA18E50-A229-D0C5-0998-6A0069FBCCB8}"/>
+              </a:ext>
+            </a:extLst>
+          </p:cNvPr>
+          <p:cNvPicPr>
+            <a:picLocks noChangeAspect="1"/>
+          </p:cNvPicPr>
+          <p:nvPr/>
+        </p:nvPicPr>
+        <p:blipFill>
+          <a:blip r:embed="rId3">
+            <a:extLst>
+              <a:ext uri="{28A0092B-C50C-407E-A947-70E740481C1C}">
+                <a14:useLocalDpi xmlns:a14="http://schemas.microsoft.com/office/drawing/2010/main" val="0"/>
+              </a:ext>
+            </a:extLst>
+          </a:blip>
+          <a:stretch>
+            <a:fillRect/>
+          </a:stretch>
+        </p:blipFill>
+        <p:spPr>
+          <a:xfrm>
+            <a:off x="5334000" y="644630"/>
+            <a:ext cx="5568739" cy="5568739"/>
+          </a:xfrm>
+          <a:prstGeom prst="rect">
+            <a:avLst/>
+          </a:prstGeom>
+          <a:noFill/>
+        </p:spPr>
+      </p:pic>
     </p:spTree>
     <p:custDataLst>
       <p:tags r:id="rId1"/>
